--- a/docs/Agentic_Testing_Demo_v2.pptx
+++ b/docs/Agentic_Testing_Demo_v2.pptx
@@ -1974,7 +1974,7 @@
                 <a:ea typeface="Calibri" pitchFamily="34" charset="-122"/>
                 <a:cs typeface="Calibri" pitchFamily="34" charset="-120"/>
               </a:rPr>
-              <a:t>Lead QA Engineer  ·  Autonomize</a:t>
+              <a:t>Lead QA Engineer  ·  EX Squared</a:t>
             </a:r>
             <a:endParaRPr lang="en-US" sz="1400" dirty="0"/>
           </a:p>
